--- a/上課簡報_作品1_我的魔法小宇宙.pptx
+++ b/上課簡報_作品1_我的魔法小宇宙.pptx
@@ -5605,224 +5605,24 @@
           </a:p>
         </p:txBody>
       </p:sp>
-      <p:sp>
-        <p:nvSpPr>
-          <p:cNvPr id="5" name="Rectangle 4"/>
-          <p:cNvSpPr/>
-          <p:nvPr/>
-        </p:nvSpPr>
-        <p:spPr>
-          <a:xfrm>
-            <a:off x="411480" y="1234440"/>
-            <a:ext cx="5577840" cy="502920"/>
-          </a:xfrm>
-          <a:prstGeom prst="rect">
-            <a:avLst/>
-          </a:prstGeom>
-          <a:solidFill>
-            <a:srgbClr val="C5BEE3"/>
-          </a:solidFill>
-          <a:ln>
-            <a:noFill/>
-          </a:ln>
-          <a:effectLst/>
-        </p:spPr>
-        <p:style>
-          <a:lnRef idx="1">
-            <a:schemeClr val="accent1"/>
-          </a:lnRef>
-          <a:fillRef idx="3">
-            <a:schemeClr val="accent1"/>
-          </a:fillRef>
-          <a:effectRef idx="2">
-            <a:schemeClr val="accent1"/>
-          </a:effectRef>
-          <a:fontRef idx="minor">
-            <a:schemeClr val="lt1"/>
-          </a:fontRef>
-        </p:style>
-        <p:txBody>
-          <a:bodyPr rtlCol="0" anchor="ctr"/>
-          <a:lstStyle/>
-          <a:p>
-            <a:pPr algn="ctr"/>
-          </a:p>
-        </p:txBody>
-      </p:sp>
-      <p:sp>
-        <p:nvSpPr>
-          <p:cNvPr id="6" name="TextBox 5"/>
-          <p:cNvSpPr txBox="1"/>
-          <p:nvPr/>
-        </p:nvSpPr>
-        <p:spPr>
-          <a:xfrm>
-            <a:off x="411480" y="1261872"/>
-            <a:ext cx="5577840" cy="457200"/>
-          </a:xfrm>
-          <a:prstGeom prst="rect">
-            <a:avLst/>
-          </a:prstGeom>
-          <a:noFill/>
-        </p:spPr>
-        <p:txBody>
-          <a:bodyPr wrap="square" anchor="ctr">
-            <a:spAutoFit/>
-          </a:bodyPr>
-          <a:lstStyle/>
-          <a:p>
-            <a:pPr algn="ctr">
-              <a:lnSpc>
-                <a:spcPct val="100000"/>
-              </a:lnSpc>
-              <a:spcAft>
-                <a:spcPts val="800"/>
-              </a:spcAft>
-            </a:pPr>
-            <a:r>
-              <a:rPr sz="2000" b="1">
-                <a:solidFill>
-                  <a:srgbClr val="5A48B0"/>
-                </a:solidFill>
-                <a:latin typeface="微軟正黑體"/>
-                <a:ea typeface="微軟正黑體"/>
-                <a:cs typeface="微軟正黑體"/>
-              </a:rPr>
-              <a:t>小一範例</a:t>
-            </a:r>
-          </a:p>
-        </p:txBody>
-      </p:sp>
       <p:pic>
         <p:nvPicPr>
-          <p:cNvPr id="7" name="Picture 6" descr="work-01-g1.jpg"/>
+          <p:cNvPr id="5" name="Picture 4" descr="work-01-compare.jpg"/>
           <p:cNvPicPr>
             <a:picLocks noChangeAspect="1"/>
           </p:cNvPicPr>
           <p:nvPr/>
         </p:nvPicPr>
         <p:blipFill>
-          <a:blip r:embed="rId2"/>
+          <a:blip r:embed="rId4"/>
           <a:stretch>
             <a:fillRect/>
           </a:stretch>
         </p:blipFill>
         <p:spPr>
           <a:xfrm>
-            <a:off x="1051560" y="1828800"/>
-            <a:ext cx="4297680" cy="4297680"/>
-          </a:xfrm>
-          <a:prstGeom prst="rect">
-            <a:avLst/>
-          </a:prstGeom>
-        </p:spPr>
-      </p:pic>
-      <p:sp>
-        <p:nvSpPr>
-          <p:cNvPr id="8" name="Rectangle 7"/>
-          <p:cNvSpPr/>
-          <p:nvPr/>
-        </p:nvSpPr>
-        <p:spPr>
-          <a:xfrm>
-            <a:off x="6217920" y="1234440"/>
-            <a:ext cx="5577840" cy="502920"/>
-          </a:xfrm>
-          <a:prstGeom prst="rect">
-            <a:avLst/>
-          </a:prstGeom>
-          <a:solidFill>
-            <a:srgbClr val="C5BEE3"/>
-          </a:solidFill>
-          <a:ln>
-            <a:noFill/>
-          </a:ln>
-          <a:effectLst/>
-        </p:spPr>
-        <p:style>
-          <a:lnRef idx="1">
-            <a:schemeClr val="accent1"/>
-          </a:lnRef>
-          <a:fillRef idx="3">
-            <a:schemeClr val="accent1"/>
-          </a:fillRef>
-          <a:effectRef idx="2">
-            <a:schemeClr val="accent1"/>
-          </a:effectRef>
-          <a:fontRef idx="minor">
-            <a:schemeClr val="lt1"/>
-          </a:fontRef>
-        </p:style>
-        <p:txBody>
-          <a:bodyPr rtlCol="0" anchor="ctr"/>
-          <a:lstStyle/>
-          <a:p>
-            <a:pPr algn="ctr"/>
-          </a:p>
-        </p:txBody>
-      </p:sp>
-      <p:sp>
-        <p:nvSpPr>
-          <p:cNvPr id="9" name="TextBox 8"/>
-          <p:cNvSpPr txBox="1"/>
-          <p:nvPr/>
-        </p:nvSpPr>
-        <p:spPr>
-          <a:xfrm>
-            <a:off x="6217920" y="1261872"/>
-            <a:ext cx="5577840" cy="457200"/>
-          </a:xfrm>
-          <a:prstGeom prst="rect">
-            <a:avLst/>
-          </a:prstGeom>
-          <a:noFill/>
-        </p:spPr>
-        <p:txBody>
-          <a:bodyPr wrap="square" anchor="ctr">
-            <a:spAutoFit/>
-          </a:bodyPr>
-          <a:lstStyle/>
-          <a:p>
-            <a:pPr algn="ctr">
-              <a:lnSpc>
-                <a:spcPct val="100000"/>
-              </a:lnSpc>
-              <a:spcAft>
-                <a:spcPts val="800"/>
-              </a:spcAft>
-            </a:pPr>
-            <a:r>
-              <a:rPr sz="2000" b="1">
-                <a:solidFill>
-                  <a:srgbClr val="5A48B0"/>
-                </a:solidFill>
-                <a:latin typeface="微軟正黑體"/>
-                <a:ea typeface="微軟正黑體"/>
-                <a:cs typeface="微軟正黑體"/>
-              </a:rPr>
-              <a:t>小二範例</a:t>
-            </a:r>
-          </a:p>
-        </p:txBody>
-      </p:sp>
-      <p:pic>
-        <p:nvPicPr>
-          <p:cNvPr id="10" name="Picture 9" descr="work-01-g2.jpg"/>
-          <p:cNvPicPr>
-            <a:picLocks noChangeAspect="1"/>
-          </p:cNvPicPr>
-          <p:nvPr/>
-        </p:nvPicPr>
-        <p:blipFill>
-          <a:blip r:embed="rId3"/>
-          <a:stretch>
-            <a:fillRect/>
-          </a:stretch>
-        </p:blipFill>
-        <p:spPr>
-          <a:xfrm>
-            <a:off x="6661875" y="1828800"/>
-            <a:ext cx="4689929" cy="4297680"/>
+            <a:off x="2529687" y="1572768"/>
+            <a:ext cx="7132320" cy="4754880"/>
           </a:xfrm>
           <a:prstGeom prst="rect">
             <a:avLst/>

--- a/上課簡報_作品1_我的魔法小宇宙.pptx
+++ b/上課簡報_作品1_我的魔法小宇宙.pptx
@@ -3433,38 +3433,6 @@
               <a:t>兒童繪畫</a:t>
             </a:r>
           </a:p>
-          <a:p>
-            <a:pPr algn="l">
-              <a:lnSpc>
-                <a:spcPct val="100000"/>
-              </a:lnSpc>
-              <a:spcAft>
-                <a:spcPts val="800"/>
-              </a:spcAft>
-            </a:pPr>
-            <a:r>
-              <a:rPr sz="1800" b="1">
-                <a:solidFill>
-                  <a:srgbClr val="5A48B0"/>
-                </a:solidFill>
-                <a:latin typeface="微軟正黑體"/>
-                <a:ea typeface="微軟正黑體"/>
-                <a:cs typeface="微軟正黑體"/>
-              </a:rPr>
-              <a:t>上課日期：</a:t>
-            </a:r>
-            <a:r>
-              <a:rPr sz="1800" b="0">
-                <a:solidFill>
-                  <a:srgbClr val="444444"/>
-                </a:solidFill>
-                <a:latin typeface="微軟正黑體"/>
-                <a:ea typeface="微軟正黑體"/>
-                <a:cs typeface="微軟正黑體"/>
-              </a:rPr>
-              <a:t>9/4 ・ 9/11（週五）</a:t>
-            </a:r>
-          </a:p>
         </p:txBody>
       </p:sp>
       <p:pic>
@@ -4464,7 +4432,7 @@
                 <a:ea typeface="微軟正黑體"/>
                 <a:cs typeface="微軟正黑體"/>
               </a:rPr>
-              <a:t>（9/4 週五）</a:t>
+              <a:t/>
             </a:r>
           </a:p>
         </p:txBody>
@@ -5186,7 +5154,7 @@
                 <a:ea typeface="微軟正黑體"/>
                 <a:cs typeface="微軟正黑體"/>
               </a:rPr>
-              <a:t>（9/11 週五）</a:t>
+              <a:t/>
             </a:r>
           </a:p>
         </p:txBody>
@@ -5614,7 +5582,7 @@
           <p:nvPr/>
         </p:nvPicPr>
         <p:blipFill>
-          <a:blip r:embed="rId4"/>
+          <a:blip r:embed="rId5"/>
           <a:stretch>
             <a:fillRect/>
           </a:stretch>

--- a/上課簡報_作品1_我的魔法小宇宙.pptx
+++ b/上課簡報_作品1_我的魔法小宇宙.pptx
@@ -10,6 +10,7 @@
     <p:sldId id="258" r:id="rId9"/>
     <p:sldId id="259" r:id="rId10"/>
     <p:sldId id="260" r:id="rId11"/>
+    <p:sldId id="264" r:id="rId15"/>
     <p:sldId id="261" r:id="rId12"/>
     <p:sldId id="262" r:id="rId13"/>
     <p:sldId id="263" r:id="rId14"/>
@@ -6071,6 +6072,81 @@
           </a:p>
         </p:txBody>
       </p:sp>
+    </p:spTree>
+  </p:cSld>
+  <p:clrMapOvr>
+    <a:masterClrMapping/>
+  </p:clrMapOvr>
+</p:sld>
+</file>
+
+<file path=ppt/slides/slide9.xml><?xml version="1.0" encoding="utf-8"?>
+<p:sld xmlns:a="http://schemas.openxmlformats.org/drawingml/2006/main" xmlns:p="http://schemas.openxmlformats.org/presentationml/2006/main" xmlns:r="http://schemas.openxmlformats.org/officeDocument/2006/relationships">
+  <p:cSld>
+    <p:spTree>
+      <p:nvGrpSpPr>
+        <p:cNvPr id="1" name=""/>
+        <p:cNvGrpSpPr/>
+        <p:nvPr/>
+      </p:nvGrpSpPr>
+      <p:grpSpPr/>
+      <p:sp>
+        <p:nvSpPr>
+          <p:cNvPr id="2" name="TextBox 1"/>
+          <p:cNvSpPr txBox="1"/>
+          <p:nvPr/>
+        </p:nvSpPr>
+        <p:spPr>
+          <a:xfrm>
+            <a:off x="548640" y="320040"/>
+            <a:ext cx="11064240" cy="822960"/>
+          </a:xfrm>
+          <a:prstGeom prst="rect">
+            <a:avLst/>
+          </a:prstGeom>
+          <a:noFill/>
+        </p:spPr>
+        <p:txBody>
+          <a:bodyPr wrap="none">
+            <a:spAutoFit/>
+          </a:bodyPr>
+          <a:lstStyle/>
+          <a:p>
+            <a:r>
+              <a:rPr sz="3000" b="1">
+                <a:solidFill>
+                  <a:srgbClr val="5B3A8E"/>
+                </a:solidFill>
+              </a:rPr>
+              <a:t>🔧 製作步驟（圖解）</a:t>
+            </a:r>
+          </a:p>
+        </p:txBody>
+      </p:sp>
+      <p:pic>
+        <p:nvPicPr>
+          <p:cNvPr id="3" name="Picture 2" descr="work-01-steps.png"/>
+          <p:cNvPicPr>
+            <a:picLocks noChangeAspect="1"/>
+          </p:cNvPicPr>
+          <p:nvPr/>
+        </p:nvPicPr>
+        <p:blipFill>
+          <a:blip r:embed="rId2"/>
+          <a:stretch>
+            <a:fillRect/>
+          </a:stretch>
+        </p:blipFill>
+        <p:spPr>
+          <a:xfrm>
+            <a:off x="335127" y="1600200"/>
+            <a:ext cx="11521440" cy="4215160"/>
+          </a:xfrm>
+          <a:prstGeom prst="rect">
+            <a:avLst/>
+          </a:prstGeom>
+        </p:spPr>
+      </p:pic>
     </p:spTree>
   </p:cSld>
   <p:clrMapOvr>
